--- a/dist/초2/환경·생태/자원과실천/초2_환경·생태_자원과실천_01_쓰레기줄이기와분리배출.pptx
+++ b/dist/초2/환경·생태/자원과실천/초2_환경·생태_자원과실천_01_쓰레기줄이기와분리배출.pptx
@@ -115,41 +115,41 @@
   <p:extLst>
     <p:ext uri="{521415D9-36F7-43E2-AB2F-B90AF26B5E84}">
       <p14:sectionLst xmlns:p14="http://schemas.microsoft.com/office/powerpoint/2010/main">
-        <p14:section name="도입" id="{4d3213d0-ace8-fd7c-d3f9-e507fac1b073}">
+        <p14:section name="도입" id="{14fdd251-7f95-c6b5-8948-bf47ebcca93a}">
           <p14:sldIdLst>
             <p14:sldId id="256"/>
             <p14:sldId id="257"/>
           </p14:sldIdLst>
         </p14:section>
-        <p14:section name="개념" id="{669ea0c8-9e44-8771-cd90-e715082a254a}">
+        <p14:section name="개념" id="{f7a98915-123a-f30c-ba46-81bd6d3dc3b7}">
           <p14:sldIdLst>
             <p14:sldId id="258"/>
             <p14:sldId id="260"/>
           </p14:sldIdLst>
         </p14:section>
-        <p14:section name="연습" id="{1b11eab4-2be4-525c-0bfc-7e08129667f1}">
+        <p14:section name="연습" id="{47bbf3d3-e8af-ea6e-1564-6659622e07c7}">
           <p14:sldIdLst>
             <p14:sldId id="259"/>
             <p14:sldId id="261"/>
           </p14:sldIdLst>
         </p14:section>
-        <p14:section name="개념" id="{4a639f05-067f-7c1b-31e0-9bc5911d7866}">
+        <p14:section name="개념" id="{d4e71800-f82f-96f9-f474-26c44e5858fc}">
           <p14:sldIdLst/>
         </p14:section>
-        <p14:section name="연습" id="{4dab2478-feb4-5ad4-e09e-e60d7b65e711}">
+        <p14:section name="연습" id="{1ec12603-d26c-2ed8-2d68-06874e1f5a84}">
           <p14:sldIdLst/>
         </p14:section>
-        <p14:section name="확인" id="{50b70aa5-dc0a-5b79-5ff9-6280475b08d0}">
+        <p14:section name="확인" id="{c2348cb7-25ca-71a1-aaac-e811a540aff5}">
           <p14:sldIdLst>
             <p14:sldId id="262"/>
           </p14:sldIdLst>
         </p14:section>
-        <p14:section name="정리" id="{50726070-c13e-9bb1-03bd-d3349e9fcec0}">
+        <p14:section name="정리" id="{23222130-b637-bd96-9943-e818e1de3584}">
           <p14:sldIdLst>
             <p14:sldId id="263"/>
           </p14:sldIdLst>
         </p14:section>
-        <p14:section name="보충" id="{48c54f46-3ceb-7bee-1dc5-139d2f6b837c}">
+        <p14:section name="보충" id="{826aa0c3-aec4-d252-0dd9-075c083ef1ea}">
           <p14:sldIdLst>
             <p14:sldId id="264"/>
           </p14:sldIdLst>
@@ -1075,7 +1075,7 @@
 - ④ 유리병 — 비우고 헹구고, 뚜껑을 떼요.
 막히면
 - 실제 물건(과자 봉지, 상자)을 만져 보며 “이건 종이 같아, 비닐 같아?” 하고 묻습니다.
-- 물건에 찍힌 분리배출 표시(삼각형 화살표 안의 글자)를 함께 찾아봅니다.
+- 물건에 찍힌 분리배출 표시(화살표 모양 안에 ‘비닐류’, ‘캔류’처럼 종류가 적힌 표시)를 함께 찾아봅니다.
 주의
 - 떼어 낸 뚜껑을 어디에 넣는지, 투명한 음료수 페트병이나 우유팩(종이팩)을 따로 모으는지는 사는 곳마다 다릅니다. 이런 세부 규칙은 사는 곳의 안내를 확인해 알려 주세요.
 - 여기서 나눠도 됩니다. S07은 재활용품을 준비해 두고 다음 날 해도 됩니다.</a:t>
